--- a/HARDWARE/PowerPoint/MISSÃO PROCESSADOR - VERSÃO PREMIUM.pptx
+++ b/HARDWARE/PowerPoint/MISSÃO PROCESSADOR - VERSÃO PREMIUM.pptx
@@ -14,6 +14,7 @@
     <p:sldId id="262" r:id="rId8"/>
     <p:sldId id="263" r:id="rId9"/>
     <p:sldId id="264" r:id="rId10"/>
+    <p:sldId id="267" r:id="rId11"/>
   </p:sldIdLst>
   <p:sldSz cx="12192000" cy="6858000"/>
   <p:notesSz cx="6858000" cy="9144000"/>
@@ -6933,7 +6934,7 @@
           <a:p>
             <a:fld id="{BBC10A54-6111-48D9-BA31-0534966912ED}" type="datetimeFigureOut">
               <a:rPr lang="pt-BR" smtClean="0"/>
-              <a:t>13/04/2026</a:t>
+              <a:t>01/06/2026</a:t>
             </a:fld>
             <a:endParaRPr lang="pt-BR"/>
           </a:p>
@@ -7157,7 +7158,7 @@
           <a:p>
             <a:fld id="{BBC10A54-6111-48D9-BA31-0534966912ED}" type="datetimeFigureOut">
               <a:rPr lang="pt-BR" smtClean="0"/>
-              <a:t>13/04/2026</a:t>
+              <a:t>01/06/2026</a:t>
             </a:fld>
             <a:endParaRPr lang="pt-BR"/>
           </a:p>
@@ -7337,7 +7338,7 @@
           <a:p>
             <a:fld id="{BBC10A54-6111-48D9-BA31-0534966912ED}" type="datetimeFigureOut">
               <a:rPr lang="pt-BR" smtClean="0"/>
-              <a:t>13/04/2026</a:t>
+              <a:t>01/06/2026</a:t>
             </a:fld>
             <a:endParaRPr lang="pt-BR"/>
           </a:p>
@@ -7507,7 +7508,7 @@
           <a:p>
             <a:fld id="{BBC10A54-6111-48D9-BA31-0534966912ED}" type="datetimeFigureOut">
               <a:rPr lang="pt-BR" smtClean="0"/>
-              <a:t>13/04/2026</a:t>
+              <a:t>01/06/2026</a:t>
             </a:fld>
             <a:endParaRPr lang="pt-BR"/>
           </a:p>
@@ -7798,7 +7799,7 @@
           <a:p>
             <a:fld id="{BBC10A54-6111-48D9-BA31-0534966912ED}" type="datetimeFigureOut">
               <a:rPr lang="pt-BR" smtClean="0"/>
-              <a:t>13/04/2026</a:t>
+              <a:t>01/06/2026</a:t>
             </a:fld>
             <a:endParaRPr lang="pt-BR"/>
           </a:p>
@@ -8124,7 +8125,7 @@
           <a:p>
             <a:fld id="{BBC10A54-6111-48D9-BA31-0534966912ED}" type="datetimeFigureOut">
               <a:rPr lang="pt-BR" smtClean="0"/>
-              <a:t>13/04/2026</a:t>
+              <a:t>01/06/2026</a:t>
             </a:fld>
             <a:endParaRPr lang="pt-BR"/>
           </a:p>
@@ -8536,7 +8537,7 @@
           <a:p>
             <a:fld id="{BBC10A54-6111-48D9-BA31-0534966912ED}" type="datetimeFigureOut">
               <a:rPr lang="pt-BR" smtClean="0"/>
-              <a:t>13/04/2026</a:t>
+              <a:t>01/06/2026</a:t>
             </a:fld>
             <a:endParaRPr lang="pt-BR"/>
           </a:p>
@@ -8654,7 +8655,7 @@
           <a:p>
             <a:fld id="{BBC10A54-6111-48D9-BA31-0534966912ED}" type="datetimeFigureOut">
               <a:rPr lang="pt-BR" smtClean="0"/>
-              <a:t>13/04/2026</a:t>
+              <a:t>01/06/2026</a:t>
             </a:fld>
             <a:endParaRPr lang="pt-BR"/>
           </a:p>
@@ -8749,7 +8750,7 @@
           <a:p>
             <a:fld id="{BBC10A54-6111-48D9-BA31-0534966912ED}" type="datetimeFigureOut">
               <a:rPr lang="pt-BR" smtClean="0"/>
-              <a:t>13/04/2026</a:t>
+              <a:t>01/06/2026</a:t>
             </a:fld>
             <a:endParaRPr lang="pt-BR"/>
           </a:p>
@@ -9036,7 +9037,7 @@
           <a:p>
             <a:fld id="{BBC10A54-6111-48D9-BA31-0534966912ED}" type="datetimeFigureOut">
               <a:rPr lang="pt-BR" smtClean="0"/>
-              <a:t>13/04/2026</a:t>
+              <a:t>01/06/2026</a:t>
             </a:fld>
             <a:endParaRPr lang="pt-BR"/>
           </a:p>
@@ -9313,7 +9314,7 @@
           <a:p>
             <a:fld id="{BBC10A54-6111-48D9-BA31-0534966912ED}" type="datetimeFigureOut">
               <a:rPr lang="pt-BR" smtClean="0"/>
-              <a:t>13/04/2026</a:t>
+              <a:t>01/06/2026</a:t>
             </a:fld>
             <a:endParaRPr lang="pt-BR"/>
           </a:p>
@@ -9564,7 +9565,7 @@
           <a:p>
             <a:fld id="{BBC10A54-6111-48D9-BA31-0534966912ED}" type="datetimeFigureOut">
               <a:rPr lang="pt-BR" smtClean="0"/>
-              <a:t>13/04/2026</a:t>
+              <a:t>01/06/2026</a:t>
             </a:fld>
             <a:endParaRPr lang="pt-BR"/>
           </a:p>
@@ -10032,6 +10033,14 @@
 <file path=ppt/slides/slide1.xml><?xml version="1.0" encoding="utf-8"?>
 <p:sld xmlns:a="http://schemas.openxmlformats.org/drawingml/2006/main" xmlns:r="http://schemas.openxmlformats.org/officeDocument/2006/relationships" xmlns:p="http://schemas.openxmlformats.org/presentationml/2006/main">
   <p:cSld>
+    <p:bg>
+      <p:bgPr>
+        <a:solidFill>
+          <a:schemeClr val="bg1"/>
+        </a:solidFill>
+        <a:effectLst/>
+      </p:bgPr>
+    </p:bg>
     <p:spTree>
       <p:nvGrpSpPr>
         <p:cNvPr id="1" name=""/>
@@ -10046,6 +10055,46 @@
           <a:chExt cx="0" cy="0"/>
         </a:xfrm>
       </p:grpSpPr>
+      <p:pic>
+        <p:nvPicPr>
+          <p:cNvPr id="7" name="Imagem 6">
+            <a:extLst>
+              <a:ext uri="{FF2B5EF4-FFF2-40B4-BE49-F238E27FC236}">
+                <a16:creationId xmlns:a16="http://schemas.microsoft.com/office/drawing/2014/main" id="{CF1C56E7-6B2C-2A7E-A650-8BB634BF5778}"/>
+              </a:ext>
+            </a:extLst>
+          </p:cNvPr>
+          <p:cNvPicPr>
+            <a:picLocks noChangeAspect="1"/>
+          </p:cNvPicPr>
+          <p:nvPr/>
+        </p:nvPicPr>
+        <p:blipFill>
+          <a:blip r:embed="rId2">
+            <a:duotone>
+              <a:prstClr val="black"/>
+              <a:schemeClr val="tx2">
+                <a:tint val="45000"/>
+                <a:satMod val="400000"/>
+              </a:schemeClr>
+            </a:duotone>
+            <a:alphaModFix amt="25000"/>
+          </a:blip>
+          <a:srcRect t="11259" b="506"/>
+          <a:stretch>
+            <a:fillRect/>
+          </a:stretch>
+        </p:blipFill>
+        <p:spPr>
+          <a:xfrm>
+            <a:off x="20" y="10"/>
+            <a:ext cx="12191980" cy="6857990"/>
+          </a:xfrm>
+          <a:prstGeom prst="rect">
+            <a:avLst/>
+          </a:prstGeom>
+        </p:spPr>
+      </p:pic>
       <p:sp>
         <p:nvSpPr>
           <p:cNvPr id="2" name="Título 1">
@@ -10064,21 +10113,21 @@
         </p:nvSpPr>
         <p:spPr>
           <a:xfrm>
-            <a:off x="2308521" y="1"/>
-            <a:ext cx="7574957" cy="2068618"/>
+            <a:off x="1261872" y="758952"/>
+            <a:ext cx="9418320" cy="4041648"/>
           </a:xfrm>
         </p:spPr>
         <p:txBody>
           <a:bodyPr>
-            <a:normAutofit fontScale="90000"/>
+            <a:normAutofit/>
           </a:bodyPr>
           <a:lstStyle/>
           <a:p>
-            <a:pPr algn="ctr"/>
             <a:r>
               <a:rPr lang="pt-BR" b="1" dirty="0"/>
               <a:t>MISSÃO PROCESSADOR</a:t>
             </a:r>
+            <a:endParaRPr lang="pt-BR" b="1"/>
           </a:p>
         </p:txBody>
       </p:sp>
@@ -10100,68 +10149,110 @@
         </p:nvSpPr>
         <p:spPr>
           <a:xfrm>
-            <a:off x="897286" y="3205890"/>
-            <a:ext cx="3846243" cy="1655762"/>
+            <a:off x="1261872" y="4800600"/>
+            <a:ext cx="9418320" cy="1691640"/>
           </a:xfrm>
         </p:spPr>
         <p:txBody>
           <a:bodyPr>
-            <a:noAutofit/>
+            <a:normAutofit/>
           </a:bodyPr>
           <a:lstStyle/>
           <a:p>
-            <a:pPr algn="just"/>
-            <a:r>
-              <a:rPr lang="pt-BR" b="1" i="1" dirty="0"/>
+            <a:r>
+              <a:rPr lang="pt-BR" b="1" i="1">
+                <a:solidFill>
+                  <a:schemeClr val="tx1">
+                    <a:lumMod val="85000"/>
+                  </a:schemeClr>
+                </a:solidFill>
+              </a:rPr>
               <a:t>Miguel Ananias Alves</a:t>
             </a:r>
           </a:p>
           <a:p>
-            <a:pPr algn="just"/>
-            <a:r>
-              <a:rPr lang="pt-BR" b="1" i="1" dirty="0"/>
+            <a:r>
+              <a:rPr lang="pt-BR" b="1" i="1">
+                <a:solidFill>
+                  <a:schemeClr val="tx1">
+                    <a:lumMod val="85000"/>
+                  </a:schemeClr>
+                </a:solidFill>
+              </a:rPr>
               <a:t>Pedro Pereira Lima</a:t>
             </a:r>
           </a:p>
           <a:p>
-            <a:pPr algn="just"/>
-            <a:r>
-              <a:rPr lang="pt-BR" b="1" i="1" dirty="0"/>
+            <a:r>
+              <a:rPr lang="pt-BR" b="1" i="1">
+                <a:solidFill>
+                  <a:schemeClr val="tx1">
+                    <a:lumMod val="85000"/>
+                  </a:schemeClr>
+                </a:solidFill>
+              </a:rPr>
               <a:t>30 / 03 / 2026</a:t>
             </a:r>
           </a:p>
         </p:txBody>
       </p:sp>
-      <p:pic>
-        <p:nvPicPr>
-          <p:cNvPr id="7" name="Imagem 6">
+      <p:sp>
+        <p:nvSpPr>
+          <p:cNvPr id="12" name="Rectangle 11">
             <a:extLst>
               <a:ext uri="{FF2B5EF4-FFF2-40B4-BE49-F238E27FC236}">
-                <a16:creationId xmlns:a16="http://schemas.microsoft.com/office/drawing/2014/main" id="{CF1C56E7-6B2C-2A7E-A650-8BB634BF5778}"/>
+                <a16:creationId xmlns:a16="http://schemas.microsoft.com/office/drawing/2014/main" id="{BDFBFB44-5702-4C90-B87C-142B0DF5599A}"/>
+              </a:ext>
+              <a:ext uri="{C183D7F6-B498-43B3-948B-1728B52AA6E4}">
+                <adec:decorative xmlns:adec="http://schemas.microsoft.com/office/drawing/2017/decorative" val="1"/>
               </a:ext>
             </a:extLst>
           </p:cNvPr>
-          <p:cNvPicPr>
-            <a:picLocks noChangeAspect="1"/>
-          </p:cNvPicPr>
-          <p:nvPr/>
-        </p:nvPicPr>
-        <p:blipFill>
-          <a:blip r:embed="rId2"/>
-          <a:stretch>
-            <a:fillRect/>
-          </a:stretch>
-        </p:blipFill>
+          <p:cNvSpPr>
+            <a:spLocks noGrp="1" noRot="1" noChangeAspect="1" noMove="1" noResize="1" noEditPoints="1" noAdjustHandles="1" noChangeArrowheads="1" noChangeShapeType="1" noTextEdit="1"/>
+          </p:cNvSpPr>
+          <p:nvPr>
+            <p:extLst>
+              <p:ext uri="{386F3935-93C4-4BCD-93E2-E3B085C9AB24}">
+                <p16:designElem xmlns:p16="http://schemas.microsoft.com/office/powerpoint/2015/main" val="1"/>
+              </p:ext>
+            </p:extLst>
+          </p:nvPr>
+        </p:nvSpPr>
         <p:spPr>
           <a:xfrm>
-            <a:off x="4524425" y="2068618"/>
-            <a:ext cx="6770289" cy="4316683"/>
+            <a:off x="11292840" y="0"/>
+            <a:ext cx="914400" cy="6858000"/>
           </a:xfrm>
           <a:prstGeom prst="rect">
             <a:avLst/>
           </a:prstGeom>
+          <a:solidFill>
+            <a:srgbClr val="303030">
+              <a:alpha val="89804"/>
+            </a:srgbClr>
+          </a:solidFill>
+          <a:ln>
+            <a:noFill/>
+          </a:ln>
         </p:spPr>
-      </p:pic>
+        <p:style>
+          <a:lnRef idx="2">
+            <a:schemeClr val="accent1">
+              <a:shade val="50000"/>
+            </a:schemeClr>
+          </a:lnRef>
+          <a:fillRef idx="1">
+            <a:schemeClr val="accent1"/>
+          </a:fillRef>
+          <a:effectRef idx="0">
+            <a:schemeClr val="accent1"/>
+          </a:effectRef>
+          <a:fontRef idx="minor">
+            <a:schemeClr val="lt1"/>
+          </a:fontRef>
+        </p:style>
+      </p:sp>
     </p:spTree>
     <p:extLst>
       <p:ext uri="{BB962C8B-B14F-4D97-AF65-F5344CB8AC3E}">
@@ -10175,9 +10266,357 @@
 </p:sld>
 </file>
 
+<file path=ppt/slides/slide10.xml><?xml version="1.0" encoding="utf-8"?>
+<p:sld xmlns:a="http://schemas.openxmlformats.org/drawingml/2006/main" xmlns:r="http://schemas.openxmlformats.org/officeDocument/2006/relationships" xmlns:p="http://schemas.openxmlformats.org/presentationml/2006/main">
+  <p:cSld>
+    <p:spTree>
+      <p:nvGrpSpPr>
+        <p:cNvPr id="1" name="">
+          <a:extLst>
+            <a:ext uri="{FF2B5EF4-FFF2-40B4-BE49-F238E27FC236}">
+              <a16:creationId xmlns:a16="http://schemas.microsoft.com/office/drawing/2014/main" id="{0A04440E-4CBE-CEA2-1D66-C5A1712C3AB2}"/>
+            </a:ext>
+          </a:extLst>
+        </p:cNvPr>
+        <p:cNvGrpSpPr/>
+        <p:nvPr/>
+      </p:nvGrpSpPr>
+      <p:grpSpPr>
+        <a:xfrm>
+          <a:off x="0" y="0"/>
+          <a:ext cx="0" cy="0"/>
+          <a:chOff x="0" y="0"/>
+          <a:chExt cx="0" cy="0"/>
+        </a:xfrm>
+      </p:grpSpPr>
+      <p:sp>
+        <p:nvSpPr>
+          <p:cNvPr id="2" name="Título 1">
+            <a:extLst>
+              <a:ext uri="{FF2B5EF4-FFF2-40B4-BE49-F238E27FC236}">
+                <a16:creationId xmlns:a16="http://schemas.microsoft.com/office/drawing/2014/main" id="{90B08F6D-38CD-05BC-F9B8-2555A73EB8C0}"/>
+              </a:ext>
+            </a:extLst>
+          </p:cNvPr>
+          <p:cNvSpPr>
+            <a:spLocks noGrp="1"/>
+          </p:cNvSpPr>
+          <p:nvPr>
+            <p:ph type="title"/>
+          </p:nvPr>
+        </p:nvSpPr>
+        <p:spPr>
+          <a:xfrm>
+            <a:off x="1261872" y="365760"/>
+            <a:ext cx="8595360" cy="1325562"/>
+          </a:xfrm>
+        </p:spPr>
+        <p:txBody>
+          <a:bodyPr/>
+          <a:lstStyle/>
+          <a:p>
+            <a:pPr algn="ctr"/>
+            <a:r>
+              <a:rPr lang="pt-BR" dirty="0">
+                <a:solidFill>
+                  <a:schemeClr val="accent2"/>
+                </a:solidFill>
+              </a:rPr>
+              <a:t>Quiz Interativo</a:t>
+            </a:r>
+          </a:p>
+        </p:txBody>
+      </p:sp>
+      <p:sp>
+        <p:nvSpPr>
+          <p:cNvPr id="3" name="Espaço Reservado para Conteúdo 2">
+            <a:extLst>
+              <a:ext uri="{FF2B5EF4-FFF2-40B4-BE49-F238E27FC236}">
+                <a16:creationId xmlns:a16="http://schemas.microsoft.com/office/drawing/2014/main" id="{F147BE37-5AAD-221F-1014-F01BDC9EDECB}"/>
+              </a:ext>
+            </a:extLst>
+          </p:cNvPr>
+          <p:cNvSpPr>
+            <a:spLocks noGrp="1"/>
+          </p:cNvSpPr>
+          <p:nvPr>
+            <p:ph idx="1"/>
+          </p:nvPr>
+        </p:nvSpPr>
+        <p:spPr/>
+        <p:txBody>
+          <a:bodyPr/>
+          <a:lstStyle/>
+          <a:p>
+            <a:endParaRPr lang="pt-BR" dirty="0"/>
+          </a:p>
+        </p:txBody>
+      </p:sp>
+      <p:sp>
+        <p:nvSpPr>
+          <p:cNvPr id="4" name="Retângulo: Cantos Arredondados 3">
+            <a:hlinkClick r:id="rId2" action="ppaction://hlinksldjump"/>
+            <a:extLst>
+              <a:ext uri="{FF2B5EF4-FFF2-40B4-BE49-F238E27FC236}">
+                <a16:creationId xmlns:a16="http://schemas.microsoft.com/office/drawing/2014/main" id="{EFEC8C9D-D1AA-BD61-D2BA-3F6FFAF6F400}"/>
+              </a:ext>
+            </a:extLst>
+          </p:cNvPr>
+          <p:cNvSpPr/>
+          <p:nvPr/>
+        </p:nvSpPr>
+        <p:spPr>
+          <a:xfrm>
+            <a:off x="1679448" y="2590941"/>
+            <a:ext cx="7845552" cy="793084"/>
+          </a:xfrm>
+          <a:prstGeom prst="roundRect">
+            <a:avLst/>
+          </a:prstGeom>
+          <a:solidFill>
+            <a:srgbClr val="FF0000"/>
+          </a:solidFill>
+        </p:spPr>
+        <p:style>
+          <a:lnRef idx="2">
+            <a:schemeClr val="accent1">
+              <a:shade val="15000"/>
+            </a:schemeClr>
+          </a:lnRef>
+          <a:fillRef idx="1">
+            <a:schemeClr val="accent1"/>
+          </a:fillRef>
+          <a:effectRef idx="0">
+            <a:schemeClr val="accent1"/>
+          </a:effectRef>
+          <a:fontRef idx="minor">
+            <a:schemeClr val="lt1"/>
+          </a:fontRef>
+        </p:style>
+        <p:txBody>
+          <a:bodyPr rtlCol="0" anchor="ctr"/>
+          <a:lstStyle/>
+          <a:p>
+            <a:pPr algn="ctr"/>
+            <a:r>
+              <a:rPr lang="pt-BR" b="1" dirty="0">
+                <a:solidFill>
+                  <a:schemeClr val="tx1"/>
+                </a:solidFill>
+              </a:rPr>
+              <a:t>A)</a:t>
+            </a:r>
+            <a:r>
+              <a:rPr lang="pt-BR" dirty="0">
+                <a:solidFill>
+                  <a:schemeClr val="tx1"/>
+                </a:solidFill>
+              </a:rPr>
+              <a:t> Armazenar permanentemente todos os arquivos do computador.</a:t>
+            </a:r>
+          </a:p>
+        </p:txBody>
+      </p:sp>
+      <p:sp>
+        <p:nvSpPr>
+          <p:cNvPr id="5" name="Retângulo: Cantos Arredondados 4">
+            <a:extLst>
+              <a:ext uri="{FF2B5EF4-FFF2-40B4-BE49-F238E27FC236}">
+                <a16:creationId xmlns:a16="http://schemas.microsoft.com/office/drawing/2014/main" id="{5F91DE1D-118A-CFFD-BB32-63708FA0F775}"/>
+              </a:ext>
+            </a:extLst>
+          </p:cNvPr>
+          <p:cNvSpPr/>
+          <p:nvPr/>
+        </p:nvSpPr>
+        <p:spPr>
+          <a:xfrm>
+            <a:off x="1261872" y="1691322"/>
+            <a:ext cx="8595360" cy="832422"/>
+          </a:xfrm>
+          <a:prstGeom prst="roundRect">
+            <a:avLst/>
+          </a:prstGeom>
+          <a:solidFill>
+            <a:schemeClr val="bg1"/>
+          </a:solidFill>
+        </p:spPr>
+        <p:style>
+          <a:lnRef idx="2">
+            <a:schemeClr val="accent1">
+              <a:shade val="15000"/>
+            </a:schemeClr>
+          </a:lnRef>
+          <a:fillRef idx="1">
+            <a:schemeClr val="accent1"/>
+          </a:fillRef>
+          <a:effectRef idx="0">
+            <a:schemeClr val="accent1"/>
+          </a:effectRef>
+          <a:fontRef idx="minor">
+            <a:schemeClr val="lt1"/>
+          </a:fontRef>
+        </p:style>
+        <p:txBody>
+          <a:bodyPr rtlCol="0" anchor="ctr"/>
+          <a:lstStyle/>
+          <a:p>
+            <a:pPr algn="ctr"/>
+            <a:r>
+              <a:rPr lang="pt-BR" dirty="0"/>
+              <a:t>Qual é a função da memória cache em um processador?</a:t>
+            </a:r>
+          </a:p>
+        </p:txBody>
+      </p:sp>
+      <p:sp>
+        <p:nvSpPr>
+          <p:cNvPr id="6" name="Retângulo: Cantos Arredondados 5">
+            <a:extLst>
+              <a:ext uri="{FF2B5EF4-FFF2-40B4-BE49-F238E27FC236}">
+                <a16:creationId xmlns:a16="http://schemas.microsoft.com/office/drawing/2014/main" id="{F623CD5F-A67B-0800-B12A-EE0BD6D265FB}"/>
+              </a:ext>
+            </a:extLst>
+          </p:cNvPr>
+          <p:cNvSpPr/>
+          <p:nvPr/>
+        </p:nvSpPr>
+        <p:spPr>
+          <a:xfrm>
+            <a:off x="1679448" y="3521503"/>
+            <a:ext cx="7845552" cy="926592"/>
+          </a:xfrm>
+          <a:prstGeom prst="roundRect">
+            <a:avLst/>
+          </a:prstGeom>
+          <a:solidFill>
+            <a:srgbClr val="00B050"/>
+          </a:solidFill>
+        </p:spPr>
+        <p:style>
+          <a:lnRef idx="2">
+            <a:schemeClr val="accent1">
+              <a:shade val="15000"/>
+            </a:schemeClr>
+          </a:lnRef>
+          <a:fillRef idx="1">
+            <a:schemeClr val="accent1"/>
+          </a:fillRef>
+          <a:effectRef idx="0">
+            <a:schemeClr val="accent1"/>
+          </a:effectRef>
+          <a:fontRef idx="minor">
+            <a:schemeClr val="lt1"/>
+          </a:fontRef>
+        </p:style>
+        <p:txBody>
+          <a:bodyPr rtlCol="0" anchor="ctr"/>
+          <a:lstStyle/>
+          <a:p>
+            <a:pPr algn="ctr"/>
+            <a:r>
+              <a:rPr lang="pt-BR" b="1" dirty="0">
+                <a:solidFill>
+                  <a:schemeClr val="tx2">
+                    <a:lumMod val="10000"/>
+                  </a:schemeClr>
+                </a:solidFill>
+              </a:rPr>
+              <a:t>B)</a:t>
+            </a:r>
+            <a:r>
+              <a:rPr lang="pt-BR" dirty="0">
+                <a:solidFill>
+                  <a:schemeClr val="tx2">
+                    <a:lumMod val="10000"/>
+                  </a:schemeClr>
+                </a:solidFill>
+              </a:rPr>
+              <a:t> Guardar temporariamente dados e instruções usados com frequência para acelerar o processamento.</a:t>
+            </a:r>
+          </a:p>
+        </p:txBody>
+      </p:sp>
+      <p:sp>
+        <p:nvSpPr>
+          <p:cNvPr id="7" name="Retângulo: Cantos Arredondados 6">
+            <a:extLst>
+              <a:ext uri="{FF2B5EF4-FFF2-40B4-BE49-F238E27FC236}">
+                <a16:creationId xmlns:a16="http://schemas.microsoft.com/office/drawing/2014/main" id="{CC149FEF-4F68-E642-F9CC-D2FB00956DB4}"/>
+              </a:ext>
+            </a:extLst>
+          </p:cNvPr>
+          <p:cNvSpPr/>
+          <p:nvPr/>
+        </p:nvSpPr>
+        <p:spPr>
+          <a:xfrm>
+            <a:off x="1679448" y="4585573"/>
+            <a:ext cx="7845552" cy="926592"/>
+          </a:xfrm>
+          <a:prstGeom prst="roundRect">
+            <a:avLst/>
+          </a:prstGeom>
+          <a:solidFill>
+            <a:srgbClr val="FF0000"/>
+          </a:solidFill>
+        </p:spPr>
+        <p:style>
+          <a:lnRef idx="2">
+            <a:schemeClr val="accent1">
+              <a:shade val="15000"/>
+            </a:schemeClr>
+          </a:lnRef>
+          <a:fillRef idx="1">
+            <a:schemeClr val="accent1"/>
+          </a:fillRef>
+          <a:effectRef idx="0">
+            <a:schemeClr val="accent1"/>
+          </a:effectRef>
+          <a:fontRef idx="minor">
+            <a:schemeClr val="lt1"/>
+          </a:fontRef>
+        </p:style>
+        <p:txBody>
+          <a:bodyPr rtlCol="0" anchor="ctr"/>
+          <a:lstStyle/>
+          <a:p>
+            <a:pPr algn="ctr"/>
+            <a:r>
+              <a:rPr lang="pt-BR" b="1" dirty="0"/>
+              <a:t>C)</a:t>
+            </a:r>
+            <a:r>
+              <a:rPr lang="pt-BR" dirty="0"/>
+              <a:t> Resfriar o processador durante tarefas pesadas.</a:t>
+            </a:r>
+          </a:p>
+        </p:txBody>
+      </p:sp>
+    </p:spTree>
+    <p:extLst>
+      <p:ext uri="{BB962C8B-B14F-4D97-AF65-F5344CB8AC3E}">
+        <p14:creationId xmlns:p14="http://schemas.microsoft.com/office/powerpoint/2010/main" val="3926556839"/>
+      </p:ext>
+    </p:extLst>
+  </p:cSld>
+  <p:clrMapOvr>
+    <a:masterClrMapping/>
+  </p:clrMapOvr>
+</p:sld>
+</file>
+
 <file path=ppt/slides/slide2.xml><?xml version="1.0" encoding="utf-8"?>
 <p:sld xmlns:a="http://schemas.openxmlformats.org/drawingml/2006/main" xmlns:r="http://schemas.openxmlformats.org/officeDocument/2006/relationships" xmlns:p="http://schemas.openxmlformats.org/presentationml/2006/main">
   <p:cSld>
+    <p:bg>
+      <p:bgPr>
+        <a:solidFill>
+          <a:schemeClr val="bg1"/>
+        </a:solidFill>
+        <a:effectLst/>
+      </p:bgPr>
+    </p:bg>
     <p:spTree>
       <p:nvGrpSpPr>
         <p:cNvPr id="1" name=""/>
@@ -10192,6 +10631,61 @@
           <a:chExt cx="0" cy="0"/>
         </a:xfrm>
       </p:grpSpPr>
+      <p:sp>
+        <p:nvSpPr>
+          <p:cNvPr id="14" name="Rectangle 13">
+            <a:extLst>
+              <a:ext uri="{FF2B5EF4-FFF2-40B4-BE49-F238E27FC236}">
+                <a16:creationId xmlns:a16="http://schemas.microsoft.com/office/drawing/2014/main" id="{1CC5CC88-D452-405A-A68E-CB09DB90990E}"/>
+              </a:ext>
+              <a:ext uri="{C183D7F6-B498-43B3-948B-1728B52AA6E4}">
+                <adec:decorative xmlns:adec="http://schemas.microsoft.com/office/drawing/2017/decorative" val="1"/>
+              </a:ext>
+            </a:extLst>
+          </p:cNvPr>
+          <p:cNvSpPr>
+            <a:spLocks noGrp="1" noRot="1" noChangeAspect="1" noMove="1" noResize="1" noEditPoints="1" noAdjustHandles="1" noChangeArrowheads="1" noChangeShapeType="1" noTextEdit="1"/>
+          </p:cNvSpPr>
+          <p:nvPr>
+            <p:extLst>
+              <p:ext uri="{386F3935-93C4-4BCD-93E2-E3B085C9AB24}">
+                <p16:designElem xmlns:p16="http://schemas.microsoft.com/office/powerpoint/2015/main" val="1"/>
+              </p:ext>
+            </p:extLst>
+          </p:nvPr>
+        </p:nvSpPr>
+        <p:spPr>
+          <a:xfrm>
+            <a:off x="11292840" y="0"/>
+            <a:ext cx="914400" cy="6858000"/>
+          </a:xfrm>
+          <a:prstGeom prst="rect">
+            <a:avLst/>
+          </a:prstGeom>
+          <a:solidFill>
+            <a:srgbClr val="303030"/>
+          </a:solidFill>
+          <a:ln>
+            <a:noFill/>
+          </a:ln>
+        </p:spPr>
+        <p:style>
+          <a:lnRef idx="2">
+            <a:schemeClr val="accent1">
+              <a:shade val="50000"/>
+            </a:schemeClr>
+          </a:lnRef>
+          <a:fillRef idx="1">
+            <a:schemeClr val="accent1"/>
+          </a:fillRef>
+          <a:effectRef idx="0">
+            <a:schemeClr val="accent1"/>
+          </a:effectRef>
+          <a:fontRef idx="minor">
+            <a:schemeClr val="lt1"/>
+          </a:fontRef>
+        </p:style>
+      </p:sp>
       <p:sp>
         <p:nvSpPr>
           <p:cNvPr id="4" name="Título 3">
@@ -10210,23 +10704,35 @@
         </p:nvSpPr>
         <p:spPr>
           <a:xfrm>
-            <a:off x="841248" y="393270"/>
-            <a:ext cx="5254752" cy="924085"/>
+            <a:off x="643831" y="640080"/>
+            <a:ext cx="3690425" cy="1325562"/>
           </a:xfrm>
         </p:spPr>
         <p:txBody>
-          <a:bodyPr>
-            <a:noAutofit/>
+          <a:bodyPr vert="horz" lIns="91440" tIns="45720" rIns="91440" bIns="45720" rtlCol="0" anchor="b">
+            <a:normAutofit/>
           </a:bodyPr>
           <a:lstStyle/>
           <a:p>
             <a:r>
-              <a:rPr lang="pt-BR" sz="2800" b="1" dirty="0">
-                <a:solidFill>
-                  <a:schemeClr val="accent2"/>
-                </a:solidFill>
-              </a:rPr>
-              <a:t>O que é um processador?</a:t>
+              <a:rPr lang="en-US" b="1" dirty="0"/>
+              <a:t>O </a:t>
+            </a:r>
+            <a:r>
+              <a:rPr lang="en-US" b="1" dirty="0" err="1"/>
+              <a:t>que</a:t>
+            </a:r>
+            <a:r>
+              <a:rPr lang="en-US" b="1" dirty="0"/>
+              <a:t> é um </a:t>
+            </a:r>
+            <a:r>
+              <a:rPr lang="en-US" b="1" dirty="0" err="1"/>
+              <a:t>processador</a:t>
+            </a:r>
+            <a:r>
+              <a:rPr lang="en-US" b="1" dirty="0"/>
+              <a:t>?</a:t>
             </a:r>
           </a:p>
         </p:txBody>
@@ -10249,43 +10755,699 @@
         </p:nvSpPr>
         <p:spPr>
           <a:xfrm>
-            <a:off x="841248" y="1534190"/>
-            <a:ext cx="4056215" cy="4638009"/>
+            <a:off x="643831" y="1936955"/>
+            <a:ext cx="3690425" cy="4243182"/>
           </a:xfrm>
         </p:spPr>
         <p:txBody>
-          <a:bodyPr>
-            <a:normAutofit lnSpcReduction="10000"/>
+          <a:bodyPr vert="horz" lIns="91440" tIns="45720" rIns="91440" bIns="45720" rtlCol="0">
+            <a:normAutofit/>
           </a:bodyPr>
           <a:lstStyle/>
           <a:p>
-            <a:r>
-              <a:rPr lang="pt-BR" sz="1700" dirty="0"/>
+            <a:pPr indent="-182880">
+              <a:lnSpc>
+                <a:spcPct val="104000"/>
+              </a:lnSpc>
+            </a:pPr>
+            <a:r>
+              <a:rPr lang="en-US" sz="1500" dirty="0">
+                <a:highlight>
+                  <a:srgbClr val="008080"/>
+                </a:highlight>
+              </a:rPr>
               <a:t>O </a:t>
             </a:r>
             <a:r>
-              <a:rPr lang="pt-BR" sz="1700" b="1" dirty="0"/>
-              <a:t>Processador (CPU - Unidade Central de Processamento)</a:t>
-            </a:r>
-            <a:r>
-              <a:rPr lang="pt-BR" sz="1700" dirty="0"/>
-              <a:t> é o cérebro do computador, responsável por executar todas as instruções e cálculos necessários para fazer seu sistema funcionar.</a:t>
-            </a:r>
-          </a:p>
-          <a:p>
-            <a:r>
-              <a:rPr lang="pt-BR" sz="1700" dirty="0"/>
-              <a:t>Ele interpreta comandos de software, realiza operações matemáticas complexas e coordena a comunicação entre todos os componentes do computador em tempo real.</a:t>
-            </a:r>
-          </a:p>
-          <a:p>
-            <a:r>
-              <a:rPr lang="pt-BR" sz="1700" dirty="0"/>
-              <a:t>Sem a CPU, o computador simplesmente não funciona - ela é o componente mais essencial de qualquer sistema digital.</a:t>
-            </a:r>
-          </a:p>
-          <a:p>
-            <a:endParaRPr lang="pt-BR" dirty="0"/>
+              <a:rPr lang="en-US" sz="1500" b="1" dirty="0" err="1">
+                <a:highlight>
+                  <a:srgbClr val="008080"/>
+                </a:highlight>
+              </a:rPr>
+              <a:t>Processador</a:t>
+            </a:r>
+            <a:r>
+              <a:rPr lang="en-US" sz="1500" b="1" dirty="0">
+                <a:highlight>
+                  <a:srgbClr val="008080"/>
+                </a:highlight>
+              </a:rPr>
+              <a:t> (CPU - </a:t>
+            </a:r>
+            <a:r>
+              <a:rPr lang="en-US" sz="1500" b="1" dirty="0" err="1">
+                <a:highlight>
+                  <a:srgbClr val="008080"/>
+                </a:highlight>
+              </a:rPr>
+              <a:t>Unidade</a:t>
+            </a:r>
+            <a:r>
+              <a:rPr lang="en-US" sz="1500" b="1" dirty="0">
+                <a:highlight>
+                  <a:srgbClr val="008080"/>
+                </a:highlight>
+              </a:rPr>
+              <a:t> Central de </a:t>
+            </a:r>
+            <a:r>
+              <a:rPr lang="en-US" sz="1500" b="1" dirty="0" err="1">
+                <a:highlight>
+                  <a:srgbClr val="008080"/>
+                </a:highlight>
+              </a:rPr>
+              <a:t>Processamento</a:t>
+            </a:r>
+            <a:r>
+              <a:rPr lang="en-US" sz="1500" b="1" dirty="0">
+                <a:highlight>
+                  <a:srgbClr val="008080"/>
+                </a:highlight>
+              </a:rPr>
+              <a:t>)</a:t>
+            </a:r>
+            <a:r>
+              <a:rPr lang="en-US" sz="1500" dirty="0">
+                <a:highlight>
+                  <a:srgbClr val="008080"/>
+                </a:highlight>
+              </a:rPr>
+              <a:t> é o </a:t>
+            </a:r>
+            <a:r>
+              <a:rPr lang="en-US" sz="1500" dirty="0" err="1">
+                <a:highlight>
+                  <a:srgbClr val="008080"/>
+                </a:highlight>
+              </a:rPr>
+              <a:t>cérebro</a:t>
+            </a:r>
+            <a:r>
+              <a:rPr lang="en-US" sz="1500" dirty="0">
+                <a:highlight>
+                  <a:srgbClr val="008080"/>
+                </a:highlight>
+              </a:rPr>
+              <a:t> do </a:t>
+            </a:r>
+            <a:r>
+              <a:rPr lang="en-US" sz="1500" dirty="0" err="1">
+                <a:highlight>
+                  <a:srgbClr val="008080"/>
+                </a:highlight>
+              </a:rPr>
+              <a:t>computador</a:t>
+            </a:r>
+            <a:r>
+              <a:rPr lang="en-US" sz="1500" dirty="0">
+                <a:highlight>
+                  <a:srgbClr val="008080"/>
+                </a:highlight>
+              </a:rPr>
+              <a:t>, </a:t>
+            </a:r>
+            <a:r>
+              <a:rPr lang="en-US" sz="1500" dirty="0" err="1">
+                <a:highlight>
+                  <a:srgbClr val="008080"/>
+                </a:highlight>
+              </a:rPr>
+              <a:t>responsável</a:t>
+            </a:r>
+            <a:r>
+              <a:rPr lang="en-US" sz="1500" dirty="0">
+                <a:highlight>
+                  <a:srgbClr val="008080"/>
+                </a:highlight>
+              </a:rPr>
+              <a:t> </a:t>
+            </a:r>
+            <a:r>
+              <a:rPr lang="en-US" sz="1500" dirty="0" err="1">
+                <a:highlight>
+                  <a:srgbClr val="008080"/>
+                </a:highlight>
+              </a:rPr>
+              <a:t>por</a:t>
+            </a:r>
+            <a:r>
+              <a:rPr lang="en-US" sz="1500" dirty="0">
+                <a:highlight>
+                  <a:srgbClr val="008080"/>
+                </a:highlight>
+              </a:rPr>
+              <a:t> </a:t>
+            </a:r>
+            <a:r>
+              <a:rPr lang="en-US" sz="1500" dirty="0" err="1">
+                <a:highlight>
+                  <a:srgbClr val="008080"/>
+                </a:highlight>
+              </a:rPr>
+              <a:t>executar</a:t>
+            </a:r>
+            <a:r>
+              <a:rPr lang="en-US" sz="1500" dirty="0">
+                <a:highlight>
+                  <a:srgbClr val="008080"/>
+                </a:highlight>
+              </a:rPr>
+              <a:t> </a:t>
+            </a:r>
+            <a:r>
+              <a:rPr lang="en-US" sz="1500" dirty="0" err="1">
+                <a:highlight>
+                  <a:srgbClr val="008080"/>
+                </a:highlight>
+              </a:rPr>
+              <a:t>todas</a:t>
+            </a:r>
+            <a:r>
+              <a:rPr lang="en-US" sz="1500" dirty="0">
+                <a:highlight>
+                  <a:srgbClr val="008080"/>
+                </a:highlight>
+              </a:rPr>
+              <a:t> as </a:t>
+            </a:r>
+            <a:r>
+              <a:rPr lang="en-US" sz="1500" dirty="0" err="1">
+                <a:highlight>
+                  <a:srgbClr val="008080"/>
+                </a:highlight>
+              </a:rPr>
+              <a:t>instruções</a:t>
+            </a:r>
+            <a:r>
+              <a:rPr lang="en-US" sz="1500" dirty="0">
+                <a:highlight>
+                  <a:srgbClr val="008080"/>
+                </a:highlight>
+              </a:rPr>
+              <a:t> e </a:t>
+            </a:r>
+            <a:r>
+              <a:rPr lang="en-US" sz="1500" dirty="0" err="1">
+                <a:highlight>
+                  <a:srgbClr val="008080"/>
+                </a:highlight>
+              </a:rPr>
+              <a:t>cálculos</a:t>
+            </a:r>
+            <a:r>
+              <a:rPr lang="en-US" sz="1500" dirty="0">
+                <a:highlight>
+                  <a:srgbClr val="008080"/>
+                </a:highlight>
+              </a:rPr>
+              <a:t> </a:t>
+            </a:r>
+            <a:r>
+              <a:rPr lang="en-US" sz="1500" dirty="0" err="1">
+                <a:highlight>
+                  <a:srgbClr val="008080"/>
+                </a:highlight>
+              </a:rPr>
+              <a:t>necessários</a:t>
+            </a:r>
+            <a:r>
+              <a:rPr lang="en-US" sz="1500" dirty="0">
+                <a:highlight>
+                  <a:srgbClr val="008080"/>
+                </a:highlight>
+              </a:rPr>
+              <a:t> para </a:t>
+            </a:r>
+            <a:r>
+              <a:rPr lang="en-US" sz="1500" dirty="0" err="1">
+                <a:highlight>
+                  <a:srgbClr val="008080"/>
+                </a:highlight>
+              </a:rPr>
+              <a:t>fazer</a:t>
+            </a:r>
+            <a:r>
+              <a:rPr lang="en-US" sz="1500" dirty="0">
+                <a:highlight>
+                  <a:srgbClr val="008080"/>
+                </a:highlight>
+              </a:rPr>
+              <a:t> </a:t>
+            </a:r>
+            <a:r>
+              <a:rPr lang="en-US" sz="1500" dirty="0" err="1">
+                <a:highlight>
+                  <a:srgbClr val="008080"/>
+                </a:highlight>
+              </a:rPr>
+              <a:t>seu</a:t>
+            </a:r>
+            <a:r>
+              <a:rPr lang="en-US" sz="1500" dirty="0">
+                <a:highlight>
+                  <a:srgbClr val="008080"/>
+                </a:highlight>
+              </a:rPr>
+              <a:t> </a:t>
+            </a:r>
+            <a:r>
+              <a:rPr lang="en-US" sz="1500" dirty="0" err="1">
+                <a:highlight>
+                  <a:srgbClr val="008080"/>
+                </a:highlight>
+              </a:rPr>
+              <a:t>sistema</a:t>
+            </a:r>
+            <a:r>
+              <a:rPr lang="en-US" sz="1500" dirty="0">
+                <a:highlight>
+                  <a:srgbClr val="008080"/>
+                </a:highlight>
+              </a:rPr>
+              <a:t> </a:t>
+            </a:r>
+            <a:r>
+              <a:rPr lang="en-US" sz="1500" dirty="0" err="1">
+                <a:highlight>
+                  <a:srgbClr val="008080"/>
+                </a:highlight>
+              </a:rPr>
+              <a:t>funcionar</a:t>
+            </a:r>
+            <a:r>
+              <a:rPr lang="en-US" sz="1500" dirty="0">
+                <a:highlight>
+                  <a:srgbClr val="008080"/>
+                </a:highlight>
+              </a:rPr>
+              <a:t>.</a:t>
+            </a:r>
+          </a:p>
+          <a:p>
+            <a:pPr indent="-182880">
+              <a:lnSpc>
+                <a:spcPct val="104000"/>
+              </a:lnSpc>
+            </a:pPr>
+            <a:r>
+              <a:rPr lang="en-US" sz="1500" dirty="0">
+                <a:highlight>
+                  <a:srgbClr val="008080"/>
+                </a:highlight>
+              </a:rPr>
+              <a:t>Ele </a:t>
+            </a:r>
+            <a:r>
+              <a:rPr lang="en-US" sz="1500" dirty="0" err="1">
+                <a:highlight>
+                  <a:srgbClr val="008080"/>
+                </a:highlight>
+              </a:rPr>
+              <a:t>interpreta</a:t>
+            </a:r>
+            <a:r>
+              <a:rPr lang="en-US" sz="1500" dirty="0">
+                <a:highlight>
+                  <a:srgbClr val="008080"/>
+                </a:highlight>
+              </a:rPr>
+              <a:t> </a:t>
+            </a:r>
+            <a:r>
+              <a:rPr lang="en-US" sz="1500" dirty="0" err="1">
+                <a:highlight>
+                  <a:srgbClr val="008080"/>
+                </a:highlight>
+              </a:rPr>
+              <a:t>comandos</a:t>
+            </a:r>
+            <a:r>
+              <a:rPr lang="en-US" sz="1500" dirty="0">
+                <a:highlight>
+                  <a:srgbClr val="008080"/>
+                </a:highlight>
+              </a:rPr>
+              <a:t> de software, </a:t>
+            </a:r>
+            <a:r>
+              <a:rPr lang="en-US" sz="1500" dirty="0" err="1">
+                <a:highlight>
+                  <a:srgbClr val="008080"/>
+                </a:highlight>
+              </a:rPr>
+              <a:t>realiza</a:t>
+            </a:r>
+            <a:r>
+              <a:rPr lang="en-US" sz="1500" dirty="0">
+                <a:highlight>
+                  <a:srgbClr val="008080"/>
+                </a:highlight>
+              </a:rPr>
+              <a:t> </a:t>
+            </a:r>
+            <a:r>
+              <a:rPr lang="en-US" sz="1500" dirty="0" err="1">
+                <a:highlight>
+                  <a:srgbClr val="008080"/>
+                </a:highlight>
+              </a:rPr>
+              <a:t>operações</a:t>
+            </a:r>
+            <a:r>
+              <a:rPr lang="en-US" sz="1500" dirty="0">
+                <a:highlight>
+                  <a:srgbClr val="008080"/>
+                </a:highlight>
+              </a:rPr>
+              <a:t> </a:t>
+            </a:r>
+            <a:r>
+              <a:rPr lang="en-US" sz="1500" dirty="0" err="1">
+                <a:highlight>
+                  <a:srgbClr val="008080"/>
+                </a:highlight>
+              </a:rPr>
+              <a:t>matemáticas</a:t>
+            </a:r>
+            <a:r>
+              <a:rPr lang="en-US" sz="1500" dirty="0">
+                <a:highlight>
+                  <a:srgbClr val="008080"/>
+                </a:highlight>
+              </a:rPr>
+              <a:t> </a:t>
+            </a:r>
+            <a:r>
+              <a:rPr lang="en-US" sz="1500" dirty="0" err="1">
+                <a:highlight>
+                  <a:srgbClr val="008080"/>
+                </a:highlight>
+              </a:rPr>
+              <a:t>complexas</a:t>
+            </a:r>
+            <a:r>
+              <a:rPr lang="en-US" sz="1500" dirty="0">
+                <a:highlight>
+                  <a:srgbClr val="008080"/>
+                </a:highlight>
+              </a:rPr>
+              <a:t> e </a:t>
+            </a:r>
+            <a:r>
+              <a:rPr lang="en-US" sz="1500" dirty="0" err="1">
+                <a:highlight>
+                  <a:srgbClr val="008080"/>
+                </a:highlight>
+              </a:rPr>
+              <a:t>coordena</a:t>
+            </a:r>
+            <a:r>
+              <a:rPr lang="en-US" sz="1500" dirty="0">
+                <a:highlight>
+                  <a:srgbClr val="008080"/>
+                </a:highlight>
+              </a:rPr>
+              <a:t> a </a:t>
+            </a:r>
+            <a:r>
+              <a:rPr lang="en-US" sz="1500" dirty="0" err="1">
+                <a:highlight>
+                  <a:srgbClr val="008080"/>
+                </a:highlight>
+              </a:rPr>
+              <a:t>comunicação</a:t>
+            </a:r>
+            <a:r>
+              <a:rPr lang="en-US" sz="1500" dirty="0">
+                <a:highlight>
+                  <a:srgbClr val="008080"/>
+                </a:highlight>
+              </a:rPr>
+              <a:t> entre </a:t>
+            </a:r>
+            <a:r>
+              <a:rPr lang="en-US" sz="1500" dirty="0" err="1">
+                <a:highlight>
+                  <a:srgbClr val="008080"/>
+                </a:highlight>
+              </a:rPr>
+              <a:t>todos</a:t>
+            </a:r>
+            <a:r>
+              <a:rPr lang="en-US" sz="1500" dirty="0">
+                <a:highlight>
+                  <a:srgbClr val="008080"/>
+                </a:highlight>
+              </a:rPr>
+              <a:t> </a:t>
+            </a:r>
+            <a:r>
+              <a:rPr lang="en-US" sz="1500" dirty="0" err="1">
+                <a:highlight>
+                  <a:srgbClr val="008080"/>
+                </a:highlight>
+              </a:rPr>
+              <a:t>os</a:t>
+            </a:r>
+            <a:r>
+              <a:rPr lang="en-US" sz="1500" dirty="0">
+                <a:highlight>
+                  <a:srgbClr val="008080"/>
+                </a:highlight>
+              </a:rPr>
+              <a:t> </a:t>
+            </a:r>
+            <a:r>
+              <a:rPr lang="en-US" sz="1500" dirty="0" err="1">
+                <a:highlight>
+                  <a:srgbClr val="008080"/>
+                </a:highlight>
+              </a:rPr>
+              <a:t>componentes</a:t>
+            </a:r>
+            <a:r>
+              <a:rPr lang="en-US" sz="1500" dirty="0">
+                <a:highlight>
+                  <a:srgbClr val="008080"/>
+                </a:highlight>
+              </a:rPr>
+              <a:t> do </a:t>
+            </a:r>
+            <a:r>
+              <a:rPr lang="en-US" sz="1500" dirty="0" err="1">
+                <a:highlight>
+                  <a:srgbClr val="008080"/>
+                </a:highlight>
+              </a:rPr>
+              <a:t>computador</a:t>
+            </a:r>
+            <a:r>
+              <a:rPr lang="en-US" sz="1500" dirty="0">
+                <a:highlight>
+                  <a:srgbClr val="008080"/>
+                </a:highlight>
+              </a:rPr>
+              <a:t> </a:t>
+            </a:r>
+            <a:r>
+              <a:rPr lang="en-US" sz="1500" dirty="0" err="1">
+                <a:highlight>
+                  <a:srgbClr val="008080"/>
+                </a:highlight>
+              </a:rPr>
+              <a:t>em</a:t>
+            </a:r>
+            <a:r>
+              <a:rPr lang="en-US" sz="1500" dirty="0">
+                <a:highlight>
+                  <a:srgbClr val="008080"/>
+                </a:highlight>
+              </a:rPr>
+              <a:t> tempo real.</a:t>
+            </a:r>
+          </a:p>
+          <a:p>
+            <a:pPr indent="-182880">
+              <a:lnSpc>
+                <a:spcPct val="104000"/>
+              </a:lnSpc>
+            </a:pPr>
+            <a:r>
+              <a:rPr lang="en-US" sz="1500" dirty="0">
+                <a:highlight>
+                  <a:srgbClr val="008080"/>
+                </a:highlight>
+              </a:rPr>
+              <a:t>Sem a CPU, o </a:t>
+            </a:r>
+            <a:r>
+              <a:rPr lang="en-US" sz="1500" dirty="0" err="1">
+                <a:highlight>
+                  <a:srgbClr val="008080"/>
+                </a:highlight>
+              </a:rPr>
+              <a:t>computador</a:t>
+            </a:r>
+            <a:r>
+              <a:rPr lang="en-US" sz="1500" dirty="0">
+                <a:highlight>
+                  <a:srgbClr val="008080"/>
+                </a:highlight>
+              </a:rPr>
+              <a:t> </a:t>
+            </a:r>
+            <a:r>
+              <a:rPr lang="en-US" sz="1500" dirty="0" err="1">
+                <a:highlight>
+                  <a:srgbClr val="008080"/>
+                </a:highlight>
+              </a:rPr>
+              <a:t>simplesmente</a:t>
+            </a:r>
+            <a:r>
+              <a:rPr lang="en-US" sz="1500" dirty="0">
+                <a:highlight>
+                  <a:srgbClr val="008080"/>
+                </a:highlight>
+              </a:rPr>
+              <a:t> </a:t>
+            </a:r>
+            <a:r>
+              <a:rPr lang="en-US" sz="1500" dirty="0" err="1">
+                <a:highlight>
+                  <a:srgbClr val="008080"/>
+                </a:highlight>
+              </a:rPr>
+              <a:t>não</a:t>
+            </a:r>
+            <a:r>
+              <a:rPr lang="en-US" sz="1500" dirty="0">
+                <a:highlight>
+                  <a:srgbClr val="008080"/>
+                </a:highlight>
+              </a:rPr>
+              <a:t> </a:t>
+            </a:r>
+            <a:r>
+              <a:rPr lang="en-US" sz="1500" dirty="0" err="1">
+                <a:highlight>
+                  <a:srgbClr val="008080"/>
+                </a:highlight>
+              </a:rPr>
+              <a:t>funciona</a:t>
+            </a:r>
+            <a:r>
+              <a:rPr lang="en-US" sz="1500" dirty="0">
+                <a:highlight>
+                  <a:srgbClr val="008080"/>
+                </a:highlight>
+              </a:rPr>
+              <a:t> - </a:t>
+            </a:r>
+            <a:r>
+              <a:rPr lang="en-US" sz="1500" dirty="0" err="1">
+                <a:highlight>
+                  <a:srgbClr val="008080"/>
+                </a:highlight>
+              </a:rPr>
+              <a:t>ela</a:t>
+            </a:r>
+            <a:r>
+              <a:rPr lang="en-US" sz="1500" dirty="0">
+                <a:highlight>
+                  <a:srgbClr val="008080"/>
+                </a:highlight>
+              </a:rPr>
+              <a:t> é o </a:t>
+            </a:r>
+            <a:r>
+              <a:rPr lang="en-US" sz="1500" dirty="0" err="1">
+                <a:highlight>
+                  <a:srgbClr val="008080"/>
+                </a:highlight>
+              </a:rPr>
+              <a:t>componente</a:t>
+            </a:r>
+            <a:r>
+              <a:rPr lang="en-US" sz="1500" dirty="0">
+                <a:highlight>
+                  <a:srgbClr val="008080"/>
+                </a:highlight>
+              </a:rPr>
+              <a:t> </a:t>
+            </a:r>
+            <a:r>
+              <a:rPr lang="en-US" sz="1500" dirty="0" err="1">
+                <a:highlight>
+                  <a:srgbClr val="008080"/>
+                </a:highlight>
+              </a:rPr>
+              <a:t>mais</a:t>
+            </a:r>
+            <a:r>
+              <a:rPr lang="en-US" sz="1500" dirty="0">
+                <a:highlight>
+                  <a:srgbClr val="008080"/>
+                </a:highlight>
+              </a:rPr>
+              <a:t> </a:t>
+            </a:r>
+            <a:r>
+              <a:rPr lang="en-US" sz="1500" dirty="0" err="1">
+                <a:highlight>
+                  <a:srgbClr val="008080"/>
+                </a:highlight>
+              </a:rPr>
+              <a:t>essencial</a:t>
+            </a:r>
+            <a:r>
+              <a:rPr lang="en-US" sz="1500" dirty="0">
+                <a:highlight>
+                  <a:srgbClr val="008080"/>
+                </a:highlight>
+              </a:rPr>
+              <a:t> de </a:t>
+            </a:r>
+            <a:r>
+              <a:rPr lang="en-US" sz="1500" dirty="0" err="1">
+                <a:highlight>
+                  <a:srgbClr val="008080"/>
+                </a:highlight>
+              </a:rPr>
+              <a:t>qualquer</a:t>
+            </a:r>
+            <a:r>
+              <a:rPr lang="en-US" sz="1500" dirty="0">
+                <a:highlight>
+                  <a:srgbClr val="008080"/>
+                </a:highlight>
+              </a:rPr>
+              <a:t> </a:t>
+            </a:r>
+            <a:r>
+              <a:rPr lang="en-US" sz="1500" dirty="0" err="1">
+                <a:highlight>
+                  <a:srgbClr val="008080"/>
+                </a:highlight>
+              </a:rPr>
+              <a:t>sistema</a:t>
+            </a:r>
+            <a:r>
+              <a:rPr lang="en-US" sz="1500" dirty="0">
+                <a:highlight>
+                  <a:srgbClr val="008080"/>
+                </a:highlight>
+              </a:rPr>
+              <a:t> digital.</a:t>
+            </a:r>
+          </a:p>
+          <a:p>
+            <a:pPr indent="-182880">
+              <a:lnSpc>
+                <a:spcPct val="104000"/>
+              </a:lnSpc>
+            </a:pPr>
+            <a:endParaRPr lang="en-US" sz="1500" dirty="0"/>
           </a:p>
         </p:txBody>
       </p:sp>
@@ -10313,8 +11475,8 @@
         </p:blipFill>
         <p:spPr bwMode="auto">
           <a:xfrm>
-            <a:off x="4897463" y="1534189"/>
-            <a:ext cx="6292313" cy="4638010"/>
+            <a:off x="4654296" y="1387348"/>
+            <a:ext cx="6155736" cy="4093564"/>
           </a:xfrm>
           <a:prstGeom prst="rect">
             <a:avLst/>
@@ -11675,6 +12837,14 @@
 <file path=ppt/slides/slide8.xml><?xml version="1.0" encoding="utf-8"?>
 <p:sld xmlns:a="http://schemas.openxmlformats.org/drawingml/2006/main" xmlns:r="http://schemas.openxmlformats.org/officeDocument/2006/relationships" xmlns:p="http://schemas.openxmlformats.org/presentationml/2006/main">
   <p:cSld>
+    <p:bg>
+      <p:bgPr>
+        <a:solidFill>
+          <a:schemeClr val="bg1"/>
+        </a:solidFill>
+        <a:effectLst/>
+      </p:bgPr>
+    </p:bg>
     <p:spTree>
       <p:nvGrpSpPr>
         <p:cNvPr id="1" name=""/>
@@ -11705,12 +12875,30 @@
             <p:ph type="title"/>
           </p:nvPr>
         </p:nvSpPr>
-        <p:spPr/>
+        <p:spPr>
+          <a:xfrm>
+            <a:off x="643831" y="640080"/>
+            <a:ext cx="3690425" cy="1325562"/>
+          </a:xfrm>
+        </p:spPr>
         <p:txBody>
-          <a:bodyPr/>
+          <a:bodyPr>
+            <a:normAutofit/>
+          </a:bodyPr>
           <a:lstStyle/>
           <a:p>
-            <a:endParaRPr lang="pt-BR"/>
+            <a:r>
+              <a:rPr lang="pt-BR" sz="2700" b="1" dirty="0">
+                <a:solidFill>
+                  <a:schemeClr val="accent2"/>
+                </a:solidFill>
+              </a:rPr>
+              <a:t>Temperatura e Refrigeração</a:t>
+            </a:r>
+            <a:br>
+              <a:rPr lang="pt-BR" sz="2700" b="1" dirty="0"/>
+            </a:br>
+            <a:endParaRPr lang="pt-BR" sz="2700" dirty="0"/>
           </a:p>
         </p:txBody>
       </p:sp>
@@ -11730,15 +12918,162 @@
             <p:ph idx="1"/>
           </p:nvPr>
         </p:nvSpPr>
-        <p:spPr/>
+        <p:spPr>
+          <a:xfrm>
+            <a:off x="643831" y="1936955"/>
+            <a:ext cx="3690425" cy="4243182"/>
+          </a:xfrm>
+        </p:spPr>
         <p:txBody>
-          <a:bodyPr/>
+          <a:bodyPr>
+            <a:normAutofit/>
+          </a:bodyPr>
           <a:lstStyle/>
           <a:p>
-            <a:endParaRPr lang="pt-BR"/>
+            <a:r>
+              <a:rPr lang="pt-BR" sz="1600">
+                <a:highlight>
+                  <a:srgbClr val="008080"/>
+                </a:highlight>
+              </a:rPr>
+              <a:t>Durante o trabalho intenso, a CPU (processador) </a:t>
+            </a:r>
+            <a:r>
+              <a:rPr lang="pt-BR" sz="1600" b="1">
+                <a:highlight>
+                  <a:srgbClr val="008080"/>
+                </a:highlight>
+              </a:rPr>
+              <a:t>esquenta muito</a:t>
+            </a:r>
+            <a:r>
+              <a:rPr lang="pt-BR" sz="1600">
+                <a:highlight>
+                  <a:srgbClr val="008080"/>
+                </a:highlight>
+              </a:rPr>
+              <a:t> - podendo ultrapassar 90°C!</a:t>
+            </a:r>
+          </a:p>
+          <a:p>
+            <a:r>
+              <a:rPr lang="pt-BR" sz="1600">
+                <a:highlight>
+                  <a:srgbClr val="008080"/>
+                </a:highlight>
+              </a:rPr>
+              <a:t>Por isso, precisa de um </a:t>
+            </a:r>
+            <a:r>
+              <a:rPr lang="pt-BR" sz="1600" b="1">
+                <a:highlight>
+                  <a:srgbClr val="008080"/>
+                </a:highlight>
+              </a:rPr>
+              <a:t>cooler</a:t>
+            </a:r>
+            <a:r>
+              <a:rPr lang="pt-BR" sz="1600">
+                <a:highlight>
+                  <a:srgbClr val="008080"/>
+                </a:highlight>
+              </a:rPr>
+              <a:t> (ventoinha) para dissipar o calor e manter a temperatura segura.</a:t>
+            </a:r>
+          </a:p>
+          <a:p>
+            <a:r>
+              <a:rPr lang="pt-BR" sz="1600">
+                <a:highlight>
+                  <a:srgbClr val="008080"/>
+                </a:highlight>
+              </a:rPr>
+              <a:t>O resfriamento pode ser por </a:t>
+            </a:r>
+            <a:r>
+              <a:rPr lang="pt-BR" sz="1600" b="1">
+                <a:highlight>
+                  <a:srgbClr val="008080"/>
+                </a:highlight>
+              </a:rPr>
+              <a:t>ar</a:t>
+            </a:r>
+            <a:r>
+              <a:rPr lang="pt-BR" sz="1600">
+                <a:highlight>
+                  <a:srgbClr val="008080"/>
+                </a:highlight>
+              </a:rPr>
+              <a:t> (cooler comum) ou por </a:t>
+            </a:r>
+            <a:r>
+              <a:rPr lang="pt-BR" sz="1600" b="1">
+                <a:highlight>
+                  <a:srgbClr val="008080"/>
+                </a:highlight>
+              </a:rPr>
+              <a:t>água</a:t>
+            </a:r>
+            <a:r>
+              <a:rPr lang="pt-BR" sz="1600">
+                <a:highlight>
+                  <a:srgbClr val="008080"/>
+                </a:highlight>
+              </a:rPr>
+              <a:t> (sistemas mais avançados para gamers).</a:t>
+            </a:r>
+          </a:p>
+          <a:p>
+            <a:endParaRPr lang="pt-BR" sz="1600"/>
           </a:p>
         </p:txBody>
       </p:sp>
+      <p:pic>
+        <p:nvPicPr>
+          <p:cNvPr id="1026" name="Picture 2" descr="O que é cooler? Veja tipos e saiba importância no computador">
+            <a:extLst>
+              <a:ext uri="{FF2B5EF4-FFF2-40B4-BE49-F238E27FC236}">
+                <a16:creationId xmlns:a16="http://schemas.microsoft.com/office/drawing/2014/main" id="{D9C1BCBC-7CFD-F6FE-2480-601CD0DF857A}"/>
+              </a:ext>
+            </a:extLst>
+          </p:cNvPr>
+          <p:cNvPicPr>
+            <a:picLocks noChangeAspect="1" noChangeArrowheads="1"/>
+          </p:cNvPicPr>
+          <p:nvPr/>
+        </p:nvPicPr>
+        <p:blipFill>
+          <a:blip r:embed="rId2">
+            <a:extLst>
+              <a:ext uri="{28A0092B-C50C-407E-A947-70E740481C1C}">
+                <a14:useLocalDpi xmlns:a14="http://schemas.microsoft.com/office/drawing/2010/main" val="0"/>
+              </a:ext>
+            </a:extLst>
+          </a:blip>
+          <a:stretch>
+            <a:fillRect/>
+          </a:stretch>
+        </p:blipFill>
+        <p:spPr bwMode="auto">
+          <a:xfrm>
+            <a:off x="4654296" y="1702830"/>
+            <a:ext cx="6155736" cy="3462601"/>
+          </a:xfrm>
+          <a:prstGeom prst="rect">
+            <a:avLst/>
+          </a:prstGeom>
+          <a:noFill/>
+          <a:extLst>
+            <a:ext uri="{909E8E84-426E-40DD-AFC4-6F175D3DCCD1}">
+              <a14:hiddenFill xmlns:a14="http://schemas.microsoft.com/office/drawing/2010/main">
+                <a:solidFill>
+                  <a:srgbClr val="FFFFFF"/>
+                </a:solidFill>
+              </a14:hiddenFill>
+            </a:ext>
+          </a:extLst>
+        </p:spPr>
+      </p:pic>
     </p:spTree>
     <p:extLst>
       <p:ext uri="{BB962C8B-B14F-4D97-AF65-F5344CB8AC3E}">
@@ -11785,12 +13120,25 @@
             <p:ph type="title"/>
           </p:nvPr>
         </p:nvSpPr>
-        <p:spPr/>
+        <p:spPr>
+          <a:xfrm>
+            <a:off x="1261872" y="365760"/>
+            <a:ext cx="8595360" cy="1325562"/>
+          </a:xfrm>
+        </p:spPr>
         <p:txBody>
           <a:bodyPr/>
           <a:lstStyle/>
           <a:p>
-            <a:endParaRPr lang="pt-BR"/>
+            <a:pPr algn="ctr"/>
+            <a:r>
+              <a:rPr lang="pt-BR" dirty="0">
+                <a:solidFill>
+                  <a:schemeClr val="accent2"/>
+                </a:solidFill>
+              </a:rPr>
+              <a:t>Quiz Interativo</a:t>
+            </a:r>
           </a:p>
         </p:txBody>
       </p:sp>
@@ -11815,7 +13163,234 @@
           <a:bodyPr/>
           <a:lstStyle/>
           <a:p>
-            <a:endParaRPr lang="pt-BR"/>
+            <a:endParaRPr lang="pt-BR" dirty="0"/>
+          </a:p>
+        </p:txBody>
+      </p:sp>
+      <p:sp>
+        <p:nvSpPr>
+          <p:cNvPr id="4" name="Retângulo: Cantos Arredondados 3">
+            <a:hlinkClick r:id="rId2" action="ppaction://hlinksldjump"/>
+            <a:extLst>
+              <a:ext uri="{FF2B5EF4-FFF2-40B4-BE49-F238E27FC236}">
+                <a16:creationId xmlns:a16="http://schemas.microsoft.com/office/drawing/2014/main" id="{77ECCF45-815D-8F28-16B1-7A7B0D972973}"/>
+              </a:ext>
+            </a:extLst>
+          </p:cNvPr>
+          <p:cNvSpPr/>
+          <p:nvPr/>
+        </p:nvSpPr>
+        <p:spPr>
+          <a:xfrm>
+            <a:off x="1679448" y="2590941"/>
+            <a:ext cx="7845552" cy="793084"/>
+          </a:xfrm>
+          <a:prstGeom prst="roundRect">
+            <a:avLst/>
+          </a:prstGeom>
+          <a:solidFill>
+            <a:schemeClr val="tx2">
+              <a:lumMod val="25000"/>
+            </a:schemeClr>
+          </a:solidFill>
+        </p:spPr>
+        <p:style>
+          <a:lnRef idx="2">
+            <a:schemeClr val="accent1">
+              <a:shade val="15000"/>
+            </a:schemeClr>
+          </a:lnRef>
+          <a:fillRef idx="1">
+            <a:schemeClr val="accent1"/>
+          </a:fillRef>
+          <a:effectRef idx="0">
+            <a:schemeClr val="accent1"/>
+          </a:effectRef>
+          <a:fontRef idx="minor">
+            <a:schemeClr val="lt1"/>
+          </a:fontRef>
+        </p:style>
+        <p:txBody>
+          <a:bodyPr rtlCol="0" anchor="ctr"/>
+          <a:lstStyle/>
+          <a:p>
+            <a:pPr algn="ctr"/>
+            <a:r>
+              <a:rPr lang="pt-BR" b="1" dirty="0"/>
+              <a:t>A)</a:t>
+            </a:r>
+            <a:r>
+              <a:rPr lang="pt-BR" dirty="0"/>
+              <a:t> Armazenar permanentemente todos os arquivos do computador.</a:t>
+            </a:r>
+          </a:p>
+        </p:txBody>
+      </p:sp>
+      <p:sp>
+        <p:nvSpPr>
+          <p:cNvPr id="5" name="Retângulo: Cantos Arredondados 4">
+            <a:extLst>
+              <a:ext uri="{FF2B5EF4-FFF2-40B4-BE49-F238E27FC236}">
+                <a16:creationId xmlns:a16="http://schemas.microsoft.com/office/drawing/2014/main" id="{2367BF21-6D93-0D88-FB10-21312DD0C300}"/>
+              </a:ext>
+            </a:extLst>
+          </p:cNvPr>
+          <p:cNvSpPr/>
+          <p:nvPr/>
+        </p:nvSpPr>
+        <p:spPr>
+          <a:xfrm>
+            <a:off x="1261872" y="1691322"/>
+            <a:ext cx="8595360" cy="832422"/>
+          </a:xfrm>
+          <a:prstGeom prst="roundRect">
+            <a:avLst/>
+          </a:prstGeom>
+          <a:solidFill>
+            <a:schemeClr val="bg1"/>
+          </a:solidFill>
+        </p:spPr>
+        <p:style>
+          <a:lnRef idx="2">
+            <a:schemeClr val="accent1">
+              <a:shade val="15000"/>
+            </a:schemeClr>
+          </a:lnRef>
+          <a:fillRef idx="1">
+            <a:schemeClr val="accent1"/>
+          </a:fillRef>
+          <a:effectRef idx="0">
+            <a:schemeClr val="accent1"/>
+          </a:effectRef>
+          <a:fontRef idx="minor">
+            <a:schemeClr val="lt1"/>
+          </a:fontRef>
+        </p:style>
+        <p:txBody>
+          <a:bodyPr rtlCol="0" anchor="ctr"/>
+          <a:lstStyle/>
+          <a:p>
+            <a:pPr algn="ctr"/>
+            <a:r>
+              <a:rPr lang="pt-BR" dirty="0"/>
+              <a:t>Qual é a função da memória cache em um processador?</a:t>
+            </a:r>
+          </a:p>
+        </p:txBody>
+      </p:sp>
+      <p:sp>
+        <p:nvSpPr>
+          <p:cNvPr id="6" name="Retângulo: Cantos Arredondados 5">
+            <a:extLst>
+              <a:ext uri="{FF2B5EF4-FFF2-40B4-BE49-F238E27FC236}">
+                <a16:creationId xmlns:a16="http://schemas.microsoft.com/office/drawing/2014/main" id="{54F66F47-179D-CA46-CA46-BF89F81A892B}"/>
+              </a:ext>
+            </a:extLst>
+          </p:cNvPr>
+          <p:cNvSpPr/>
+          <p:nvPr/>
+        </p:nvSpPr>
+        <p:spPr>
+          <a:xfrm>
+            <a:off x="1679448" y="3521503"/>
+            <a:ext cx="7845552" cy="926592"/>
+          </a:xfrm>
+          <a:prstGeom prst="roundRect">
+            <a:avLst/>
+          </a:prstGeom>
+          <a:solidFill>
+            <a:schemeClr val="tx2">
+              <a:lumMod val="25000"/>
+            </a:schemeClr>
+          </a:solidFill>
+        </p:spPr>
+        <p:style>
+          <a:lnRef idx="2">
+            <a:schemeClr val="accent1">
+              <a:shade val="15000"/>
+            </a:schemeClr>
+          </a:lnRef>
+          <a:fillRef idx="1">
+            <a:schemeClr val="accent1"/>
+          </a:fillRef>
+          <a:effectRef idx="0">
+            <a:schemeClr val="accent1"/>
+          </a:effectRef>
+          <a:fontRef idx="minor">
+            <a:schemeClr val="lt1"/>
+          </a:fontRef>
+        </p:style>
+        <p:txBody>
+          <a:bodyPr rtlCol="0" anchor="ctr"/>
+          <a:lstStyle/>
+          <a:p>
+            <a:pPr algn="ctr"/>
+            <a:r>
+              <a:rPr lang="pt-BR" b="1" dirty="0"/>
+              <a:t>B)</a:t>
+            </a:r>
+            <a:r>
+              <a:rPr lang="pt-BR" dirty="0"/>
+              <a:t> Guardar temporariamente dados e instruções usados com frequência para acelerar o processamento.</a:t>
+            </a:r>
+          </a:p>
+        </p:txBody>
+      </p:sp>
+      <p:sp>
+        <p:nvSpPr>
+          <p:cNvPr id="7" name="Retângulo: Cantos Arredondados 6">
+            <a:extLst>
+              <a:ext uri="{FF2B5EF4-FFF2-40B4-BE49-F238E27FC236}">
+                <a16:creationId xmlns:a16="http://schemas.microsoft.com/office/drawing/2014/main" id="{BED16A07-51C0-B039-54AB-7791CCAACDE7}"/>
+              </a:ext>
+            </a:extLst>
+          </p:cNvPr>
+          <p:cNvSpPr/>
+          <p:nvPr/>
+        </p:nvSpPr>
+        <p:spPr>
+          <a:xfrm>
+            <a:off x="1679448" y="4585573"/>
+            <a:ext cx="7845552" cy="926592"/>
+          </a:xfrm>
+          <a:prstGeom prst="roundRect">
+            <a:avLst/>
+          </a:prstGeom>
+          <a:solidFill>
+            <a:schemeClr val="tx2">
+              <a:lumMod val="25000"/>
+            </a:schemeClr>
+          </a:solidFill>
+        </p:spPr>
+        <p:style>
+          <a:lnRef idx="2">
+            <a:schemeClr val="accent1">
+              <a:shade val="15000"/>
+            </a:schemeClr>
+          </a:lnRef>
+          <a:fillRef idx="1">
+            <a:schemeClr val="accent1"/>
+          </a:fillRef>
+          <a:effectRef idx="0">
+            <a:schemeClr val="accent1"/>
+          </a:effectRef>
+          <a:fontRef idx="minor">
+            <a:schemeClr val="lt1"/>
+          </a:fontRef>
+        </p:style>
+        <p:txBody>
+          <a:bodyPr rtlCol="0" anchor="ctr"/>
+          <a:lstStyle/>
+          <a:p>
+            <a:pPr algn="ctr"/>
+            <a:r>
+              <a:rPr lang="pt-BR" b="1"/>
+              <a:t>C)</a:t>
+            </a:r>
+            <a:r>
+              <a:rPr lang="pt-BR"/>
+              <a:t> Resfriar o processador durante tarefas pesadas.</a:t>
+            </a:r>
           </a:p>
         </p:txBody>
       </p:sp>
